--- a/carpentry/intake-142/PowerPoint/Day-03_2026-11-02_Week-2.pptx
+++ b/carpentry/intake-142/PowerPoint/Day-03_2026-11-02_Week-2.pptx
@@ -1189,7 +1189,7 @@
           <a:p/>
           <a:p>
             <a:r>
-              <a:t>Table 3.1 on page 44 organises BEDMAS into the ranks we are using. Notice that D and M occupy one row, and A and S occupy another. What does sharing a row tell us? Those operations have equal priority and are read left to right. Brackets can change the sequence by identifying a group that must be completed first. Use the table to justify an operation, not simply recite letters. If someone claims multiplication always precedes division, point them to the shared rank and then to the leftmost operation in the expression.</a:t>
+              <a:t>Table 3.1 on page 68 organises BEDMAS into the ranks we are using. Notice that D and M occupy one row, and A and S occupy another. What does sharing a row tell us? Those operations have equal priority and are read left to right. Brackets can change the sequence by identifying a group that must be completed first. Use the table to justify an operation, not simply recite letters. If someone claims multiplication always precedes division, point them to the shared rank and then to the leftmost operation in the expression.</a:t>
             </a:r>
           </a:p>
         </p:txBody>
@@ -1667,7 +1667,7 @@
           <a:p/>
           <a:p>
             <a:r>
-              <a:t>Complete 3A questions 8–10 and 3B questions 2–3. Then attempt two Easy questions in Numeracy Hub. For each, keep the expression, the chosen order and the checked result. Why is a screen answer alone insufficient today? It does not show whether you understood the grouping and priority of the operations. Try each question on paper first, then compare the steps and identify any difference in order.</a:t>
+              <a:t>Complete 3A questions 8–10 and 3B questions 2–3. Then attempt two Level 1 questions in Numeracy Hub. For each, keep the expression, the chosen order and the checked result. Why is a screen answer alone insufficient today? It does not show whether you understood the grouping and priority of the operations. Try each question on paper first, then compare the steps and identify any difference in order.</a:t>
             </a:r>
           </a:p>
         </p:txBody>
@@ -1819,7 +1819,7 @@
           <a:p/>
           <a:p>
             <a:r>
-              <a:t>With The order: BEDMAS open, write the expression on paper and mark the operation you will do next. Use Show steps only after that prediction. If your line differs, go back and explain which ranking or bracket caused the difference. Then attempt two Easy tasks independently. What record should remain after you leave the screen? The original expression and a sequence that shows how its operations were performed, so the result can still be checked later.</a:t>
+              <a:t>With The order: BEDMAS open, write the expression on paper and mark the operation you will do next. Use Show steps only after that prediction. If your line differs, go back and explain which ranking or bracket caused the difference. Then attempt two Level 1 tasks independently. What record should remain after you leave the screen? The original expression and a sequence that shows how its operations were performed, so the result can still be checked later.</a:t>
             </a:r>
           </a:p>
         </p:txBody>
@@ -5557,7 +5557,7 @@
                 </a:solidFill>
                 <a:latin typeface="Arial"/>
               </a:rPr>
-              <a:t>Textbook  |  page 44</a:t>
+              <a:t>Textbook  |  page 68</a:t>
             </a:r>
           </a:p>
         </p:txBody>
@@ -5605,7 +5605,7 @@
                 </a:solidFill>
                 <a:latin typeface="Arial"/>
               </a:rPr>
-              <a:t>Textbook Chapter 3 pp.44–51; Chapter 2 pp.31–33</a:t>
+              <a:t>Textbook Chapter 3 pp.68–75; Chapter 2 pp.51–53</a:t>
             </a:r>
           </a:p>
         </p:txBody>
@@ -5677,7 +5677,7 @@
                 </a:solidFill>
                 <a:latin typeface="Arial"/>
               </a:rPr>
-              <a:t>Textbook p.44 · Example 3.1: loose bolts plus equal groups.</a:t>
+              <a:t>Textbook p.68 · Example 3.1: loose bolts plus equal groups.</a:t>
             </a:r>
           </a:p>
         </p:txBody>
@@ -6291,7 +6291,7 @@
                 </a:solidFill>
                 <a:latin typeface="Arial"/>
               </a:rPr>
-              <a:t>Textbook Chapter 3 pp.44–51; Chapter 2 pp.31–33</a:t>
+              <a:t>Textbook Chapter 3 pp.68–75; Chapter 2 pp.51–53</a:t>
             </a:r>
           </a:p>
         </p:txBody>
@@ -7049,7 +7049,7 @@
                 </a:solidFill>
                 <a:latin typeface="Arial"/>
               </a:rPr>
-              <a:t>Textbook Chapter 3 pp.44–51; Chapter 2 pp.31–33</a:t>
+              <a:t>Textbook Chapter 3 pp.68–75; Chapter 2 pp.51–53</a:t>
             </a:r>
           </a:p>
         </p:txBody>
@@ -7249,7 +7249,7 @@
                 </a:solidFill>
                 <a:latin typeface="Arial"/>
               </a:rPr>
-              <a:t>Resources: Exercise Book 3A Q1–10 (p.19); 3B Q2–3 (p.21)</a:t>
+              <a:t>Resources: Exercise Book 3A Q1–10 (p.25); 3B Q2–3 (p.27)</a:t>
             </a:r>
           </a:p>
         </p:txBody>
@@ -7863,7 +7863,7 @@
                 </a:solidFill>
                 <a:latin typeface="Arial"/>
               </a:rPr>
-              <a:t>Textbook Chapter 3 pp.44–51; Chapter 2 pp.31–33</a:t>
+              <a:t>Textbook Chapter 3 pp.68–75; Chapter 2 pp.51–53</a:t>
             </a:r>
           </a:p>
         </p:txBody>
@@ -8619,7 +8619,7 @@
                 </a:solidFill>
                 <a:latin typeface="Arial"/>
               </a:rPr>
-              <a:t>Textbook Chapter 3 pp.44–51; Chapter 2 pp.31–33</a:t>
+              <a:t>Textbook Chapter 3 pp.68–75; Chapter 2 pp.51–53</a:t>
             </a:r>
           </a:p>
         </p:txBody>
@@ -9353,7 +9353,7 @@
                 </a:solidFill>
                 <a:latin typeface="Arial"/>
               </a:rPr>
-              <a:t>Textbook Chapter 3 pp.44–51; Chapter 2 pp.31–33</a:t>
+              <a:t>Textbook Chapter 3 pp.68–75; Chapter 2 pp.51–53</a:t>
             </a:r>
           </a:p>
         </p:txBody>
@@ -9401,7 +9401,7 @@
                 </a:solidFill>
                 <a:latin typeface="Arial"/>
               </a:rPr>
-              <a:t>Complete Exercise Book 3A Q8–10 and 3B Q2–3. Try two Easy Numeracy Hub tasks; record expression, order and checked result, not only the screen answer.</a:t>
+              <a:t>Complete Exercise Book 3A Q8–10 and 3B Q2–3. Try two Level 1 Numeracy Hub tasks; record expression, order and checked result, not only the screen answer.</a:t>
             </a:r>
           </a:p>
         </p:txBody>
@@ -9553,7 +9553,7 @@
                 </a:solidFill>
                 <a:latin typeface="Arial"/>
               </a:rPr>
-              <a:t>Resources: Exercise Book 3A Q1–10 (p.19); 3B Q2–3 (p.21)</a:t>
+              <a:t>Resources: Exercise Book 3A Q1–10 (p.25); 3B Q2–3 (p.27)</a:t>
             </a:r>
           </a:p>
         </p:txBody>
@@ -10167,7 +10167,7 @@
                 </a:solidFill>
                 <a:latin typeface="Arial"/>
               </a:rPr>
-              <a:t>Textbook Chapter 3 pp.44–51; Chapter 2 pp.31–33</a:t>
+              <a:t>Textbook Chapter 3 pp.68–75; Chapter 2 pp.51–53</a:t>
             </a:r>
           </a:p>
         </p:txBody>
@@ -10943,7 +10943,7 @@
                 </a:solidFill>
                 <a:latin typeface="Arial"/>
               </a:rPr>
-              <a:t>Textbook Chapter 3 pp.44–51; Chapter 2 pp.31–33</a:t>
+              <a:t>Textbook Chapter 3 pp.68–75; Chapter 2 pp.51–53</a:t>
             </a:r>
           </a:p>
         </p:txBody>
@@ -11288,7 +11288,7 @@
                 </a:solidFill>
                 <a:latin typeface="Arial"/>
               </a:rPr>
-              <a:t>Independent practice: Attempt two Easy tasks on paper first; keep the expression and operation order.</a:t>
+              <a:t>Independent practice: Attempt two Level 1 tasks on paper first; keep the expression and operation order.</a:t>
             </a:r>
           </a:p>
         </p:txBody>
@@ -11902,7 +11902,7 @@
                 </a:solidFill>
                 <a:latin typeface="Arial"/>
               </a:rPr>
-              <a:t>Textbook Chapter 3 pp.44–51; Chapter 2 pp.31–33</a:t>
+              <a:t>Textbook Chapter 3 pp.68–75; Chapter 2 pp.51–53</a:t>
             </a:r>
           </a:p>
         </p:txBody>
@@ -12613,7 +12613,7 @@
                 </a:solidFill>
                 <a:latin typeface="Arial"/>
               </a:rPr>
-              <a:t>Textbook Chapter 3 pp.44–51; Chapter 2 pp.31–33</a:t>
+              <a:t>Textbook Chapter 3 pp.68–75; Chapter 2 pp.51–53</a:t>
             </a:r>
           </a:p>
         </p:txBody>
@@ -16676,7 +16676,7 @@
                 </a:solidFill>
                 <a:latin typeface="Arial"/>
               </a:rPr>
-              <a:t>Textbook Chapter 3 pp.44–51; Chapter 2 pp.31–33</a:t>
+              <a:t>Textbook Chapter 3 pp.68–75; Chapter 2 pp.51–53</a:t>
             </a:r>
           </a:p>
         </p:txBody>
@@ -16876,7 +16876,7 @@
                 </a:solidFill>
                 <a:latin typeface="Arial"/>
               </a:rPr>
-              <a:t>Resources: Exercise Book 3A Q1–10 (p.19); 3B Q2–3 (p.21)</a:t>
+              <a:t>Resources: Exercise Book 3A Q1–10 (p.25); 3B Q2–3 (p.27)</a:t>
             </a:r>
           </a:p>
         </p:txBody>
@@ -17490,7 +17490,7 @@
                 </a:solidFill>
                 <a:latin typeface="Arial"/>
               </a:rPr>
-              <a:t>Textbook Chapter 3 pp.44–51; Chapter 2 pp.31–33</a:t>
+              <a:t>Textbook Chapter 3 pp.68–75; Chapter 2 pp.51–53</a:t>
             </a:r>
           </a:p>
         </p:txBody>
@@ -18176,7 +18176,7 @@
                 </a:solidFill>
                 <a:latin typeface="Arial"/>
               </a:rPr>
-              <a:t>Textbook Chapter 3 pp.44–51; Chapter 2 pp.31–33</a:t>
+              <a:t>Textbook Chapter 3 pp.68–75; Chapter 2 pp.51–53</a:t>
             </a:r>
           </a:p>
         </p:txBody>
@@ -18862,7 +18862,7 @@
                 </a:solidFill>
                 <a:latin typeface="Arial"/>
               </a:rPr>
-              <a:t>Textbook Chapter 3 pp.44–51; Chapter 2 pp.31–33</a:t>
+              <a:t>Textbook Chapter 3 pp.68–75; Chapter 2 pp.51–53</a:t>
             </a:r>
           </a:p>
         </p:txBody>
@@ -19062,7 +19062,7 @@
                 </a:solidFill>
                 <a:latin typeface="Arial"/>
               </a:rPr>
-              <a:t>Resources: Exercise Book 3A Q1–10 (p.19); 3B Q2–3 (p.21)</a:t>
+              <a:t>Resources: Exercise Book 3A Q1–10 (p.25); 3B Q2–3 (p.27)</a:t>
             </a:r>
           </a:p>
         </p:txBody>
@@ -20341,7 +20341,7 @@
                 </a:solidFill>
                 <a:latin typeface="Arial"/>
               </a:rPr>
-              <a:t>Textbook Chapter 3 pp.44–51</a:t>
+              <a:t>Textbook Chapter 3 pp.68–75</a:t>
             </a:r>
           </a:p>
         </p:txBody>
@@ -20541,7 +20541,7 @@
                 </a:solidFill>
                 <a:latin typeface="Arial"/>
               </a:rPr>
-              <a:t>Textbook Chapter 3 pp.44–51</a:t>
+              <a:t>Textbook Chapter 3 pp.68–75</a:t>
             </a:r>
           </a:p>
         </p:txBody>
@@ -20589,7 +20589,7 @@
                 </a:solidFill>
                 <a:latin typeface="Arial"/>
               </a:rPr>
-              <a:t>Exercise Book 3B Q1–3 (p.21); 3C Q2–3 (p.23)</a:t>
+              <a:t>Exercise Book 3B Q1–3 (p.27); 3C Q2–3 (p.29)</a:t>
             </a:r>
           </a:p>
         </p:txBody>
@@ -21251,7 +21251,7 @@
                 </a:solidFill>
                 <a:latin typeface="Arial"/>
               </a:rPr>
-              <a:t>Textbook Chapter 3 pp.44–51</a:t>
+              <a:t>Textbook Chapter 3 pp.68–75</a:t>
             </a:r>
           </a:p>
         </p:txBody>
@@ -21451,7 +21451,7 @@
                 </a:solidFill>
                 <a:latin typeface="Arial"/>
               </a:rPr>
-              <a:t>Resources: Exercise Book 3B Q1–3 (p.21); 3C Q2–3 (p.23)</a:t>
+              <a:t>Resources: Exercise Book 3B Q1–3 (p.27); 3C Q2–3 (p.29)</a:t>
             </a:r>
           </a:p>
         </p:txBody>
@@ -22200,7 +22200,7 @@
                 </a:solidFill>
                 <a:latin typeface="Arial"/>
               </a:rPr>
-              <a:t>Textbook Chapter 3 pp.44–51</a:t>
+              <a:t>Textbook Chapter 3 pp.68–75</a:t>
             </a:r>
           </a:p>
         </p:txBody>
@@ -23445,7 +23445,7 @@
                 </a:solidFill>
                 <a:latin typeface="Arial"/>
               </a:rPr>
-              <a:t>Textbook Chapter 3 pp.44–51</a:t>
+              <a:t>Textbook Chapter 3 pp.68–75</a:t>
             </a:r>
           </a:p>
         </p:txBody>
@@ -25376,7 +25376,7 @@
                 </a:solidFill>
                 <a:latin typeface="Arial"/>
               </a:rPr>
-              <a:t>Textbook Chapter 3 pp.44–51; Chapter 2 pp.31–33</a:t>
+              <a:t>Textbook Chapter 3 pp.68–75; Chapter 2 pp.51–53</a:t>
             </a:r>
           </a:p>
         </p:txBody>
@@ -25576,7 +25576,7 @@
                 </a:solidFill>
                 <a:latin typeface="Arial"/>
               </a:rPr>
-              <a:t>Textbook Chapter 3 pp.44–51; Chapter 2 pp.31–33</a:t>
+              <a:t>Textbook Chapter 3 pp.68–75; Chapter 2 pp.51–53</a:t>
             </a:r>
           </a:p>
         </p:txBody>
@@ -25624,7 +25624,7 @@
                 </a:solidFill>
                 <a:latin typeface="Arial"/>
               </a:rPr>
-              <a:t>Exercise Book 3A Q1–10 (p.19); 3B Q2–3 (p.21)</a:t>
+              <a:t>Exercise Book 3A Q1–10 (p.25); 3B Q2–3 (p.27)</a:t>
             </a:r>
           </a:p>
         </p:txBody>
@@ -26238,7 +26238,7 @@
                 </a:solidFill>
                 <a:latin typeface="Arial"/>
               </a:rPr>
-              <a:t>Textbook  |  page 46</a:t>
+              <a:t>Textbook  |  page 70</a:t>
             </a:r>
           </a:p>
         </p:txBody>
@@ -26286,7 +26286,7 @@
                 </a:solidFill>
                 <a:latin typeface="Arial"/>
               </a:rPr>
-              <a:t>Textbook Chapter 3 pp.44–51</a:t>
+              <a:t>Textbook Chapter 3 pp.68–75</a:t>
             </a:r>
           </a:p>
         </p:txBody>
@@ -26358,7 +26358,7 @@
                 </a:solidFill>
                 <a:latin typeface="Arial"/>
               </a:rPr>
-              <a:t>Textbook p.46 · Frame diagram: two lengths and two widths.</a:t>
+              <a:t>Textbook p.70 · Frame diagram: two lengths and two widths.</a:t>
             </a:r>
           </a:p>
         </p:txBody>
@@ -26924,7 +26924,7 @@
                 </a:solidFill>
                 <a:latin typeface="Arial"/>
               </a:rPr>
-              <a:t>Textbook  |  page 46</a:t>
+              <a:t>Textbook  |  page 70</a:t>
             </a:r>
           </a:p>
         </p:txBody>
@@ -26972,7 +26972,7 @@
                 </a:solidFill>
                 <a:latin typeface="Arial"/>
               </a:rPr>
-              <a:t>Textbook Chapter 3 pp.44–51</a:t>
+              <a:t>Textbook Chapter 3 pp.68–75</a:t>
             </a:r>
           </a:p>
         </p:txBody>
@@ -27044,7 +27044,7 @@
                 </a:solidFill>
                 <a:latin typeface="Arial"/>
               </a:rPr>
-              <a:t>Textbook p.46 · Example 3.3: brackets change what is multiplied.</a:t>
+              <a:t>Textbook p.70 · Example 3.3: brackets change what is multiplied.</a:t>
             </a:r>
           </a:p>
         </p:txBody>
@@ -27658,7 +27658,7 @@
                 </a:solidFill>
                 <a:latin typeface="Arial"/>
               </a:rPr>
-              <a:t>Textbook Chapter 3 pp.44–51</a:t>
+              <a:t>Textbook Chapter 3 pp.68–75</a:t>
             </a:r>
           </a:p>
         </p:txBody>
@@ -28416,7 +28416,7 @@
                 </a:solidFill>
                 <a:latin typeface="Arial"/>
               </a:rPr>
-              <a:t>Textbook Chapter 3 pp.44–51</a:t>
+              <a:t>Textbook Chapter 3 pp.68–75</a:t>
             </a:r>
           </a:p>
         </p:txBody>
@@ -28616,7 +28616,7 @@
                 </a:solidFill>
                 <a:latin typeface="Arial"/>
               </a:rPr>
-              <a:t>Resources: Exercise Book 3B Q1–3 (p.21); 3C Q2–3 (p.23)</a:t>
+              <a:t>Resources: Exercise Book 3B Q1–3 (p.27); 3C Q2–3 (p.29)</a:t>
             </a:r>
           </a:p>
         </p:txBody>
@@ -29230,7 +29230,7 @@
                 </a:solidFill>
                 <a:latin typeface="Arial"/>
               </a:rPr>
-              <a:t>Textbook Chapter 3 pp.44–51</a:t>
+              <a:t>Textbook Chapter 3 pp.68–75</a:t>
             </a:r>
           </a:p>
         </p:txBody>
@@ -29986,7 +29986,7 @@
                 </a:solidFill>
                 <a:latin typeface="Arial"/>
               </a:rPr>
-              <a:t>Textbook Chapter 3 pp.44–51</a:t>
+              <a:t>Textbook Chapter 3 pp.68–75</a:t>
             </a:r>
           </a:p>
         </p:txBody>
@@ -30720,7 +30720,7 @@
                 </a:solidFill>
                 <a:latin typeface="Arial"/>
               </a:rPr>
-              <a:t>Textbook Chapter 3 pp.44–51</a:t>
+              <a:t>Textbook Chapter 3 pp.68–75</a:t>
             </a:r>
           </a:p>
         </p:txBody>
@@ -30920,7 +30920,7 @@
                 </a:solidFill>
                 <a:latin typeface="Arial"/>
               </a:rPr>
-              <a:t>Resources: Exercise Book 3B Q1–3 (p.21); 3C Q2–3 (p.23)</a:t>
+              <a:t>Resources: Exercise Book 3B Q1–3 (p.27); 3C Q2–3 (p.29)</a:t>
             </a:r>
           </a:p>
         </p:txBody>
@@ -31534,7 +31534,7 @@
                 </a:solidFill>
                 <a:latin typeface="Arial"/>
               </a:rPr>
-              <a:t>Textbook Chapter 3 pp.44–51</a:t>
+              <a:t>Textbook Chapter 3 pp.68–75</a:t>
             </a:r>
           </a:p>
         </p:txBody>
@@ -32310,7 +32310,7 @@
                 </a:solidFill>
                 <a:latin typeface="Arial"/>
               </a:rPr>
-              <a:t>Textbook Chapter 3 pp.44–51</a:t>
+              <a:t>Textbook Chapter 3 pp.68–75</a:t>
             </a:r>
           </a:p>
         </p:txBody>
@@ -33269,7 +33269,7 @@
                 </a:solidFill>
                 <a:latin typeface="Arial"/>
               </a:rPr>
-              <a:t>Textbook Chapter 3 pp.44–51</a:t>
+              <a:t>Textbook Chapter 3 pp.68–75</a:t>
             </a:r>
           </a:p>
         </p:txBody>
@@ -33980,7 +33980,7 @@
                 </a:solidFill>
                 <a:latin typeface="Arial"/>
               </a:rPr>
-              <a:t>Textbook Chapter 3 pp.44–51; Chapter 2 pp.31–33</a:t>
+              <a:t>Textbook Chapter 3 pp.68–75; Chapter 2 pp.51–53</a:t>
             </a:r>
           </a:p>
         </p:txBody>
@@ -34180,7 +34180,7 @@
                 </a:solidFill>
                 <a:latin typeface="Arial"/>
               </a:rPr>
-              <a:t>Resources: Exercise Book 3A Q1–10 (p.19); 3B Q2–3 (p.21)</a:t>
+              <a:t>Resources: Exercise Book 3A Q1–10 (p.25); 3B Q2–3 (p.27)</a:t>
             </a:r>
           </a:p>
         </p:txBody>
@@ -34794,7 +34794,7 @@
                 </a:solidFill>
                 <a:latin typeface="Arial"/>
               </a:rPr>
-              <a:t>Textbook Chapter 3 pp.44–51</a:t>
+              <a:t>Textbook Chapter 3 pp.68–75</a:t>
             </a:r>
           </a:p>
         </p:txBody>
@@ -35481,7 +35481,7 @@
                 </a:solidFill>
                 <a:latin typeface="Arial"/>
               </a:rPr>
-              <a:t>Textbook Chapter 3 pp.44–51</a:t>
+              <a:t>Textbook Chapter 3 pp.68–75</a:t>
             </a:r>
           </a:p>
         </p:txBody>
@@ -35681,7 +35681,7 @@
                 </a:solidFill>
                 <a:latin typeface="Arial"/>
               </a:rPr>
-              <a:t>Resources: Exercise Book 3B Q1–3 (p.21); 3C Q2–3 (p.23)</a:t>
+              <a:t>Resources: Exercise Book 3B Q1–3 (p.27); 3C Q2–3 (p.29)</a:t>
             </a:r>
           </a:p>
         </p:txBody>
@@ -36295,7 +36295,7 @@
                 </a:solidFill>
                 <a:latin typeface="Arial"/>
               </a:rPr>
-              <a:t>Textbook Chapter 3 pp.44–51</a:t>
+              <a:t>Textbook Chapter 3 pp.68–75</a:t>
             </a:r>
           </a:p>
         </p:txBody>
@@ -36982,7 +36982,7 @@
                 </a:solidFill>
                 <a:latin typeface="Arial"/>
               </a:rPr>
-              <a:t>Textbook Chapter 3 pp.44–51</a:t>
+              <a:t>Textbook Chapter 3 pp.68–75</a:t>
             </a:r>
           </a:p>
         </p:txBody>
@@ -37668,7 +37668,7 @@
                 </a:solidFill>
                 <a:latin typeface="Arial"/>
               </a:rPr>
-              <a:t>Textbook Chapter 3 pp.44–51</a:t>
+              <a:t>Textbook Chapter 3 pp.68–75</a:t>
             </a:r>
           </a:p>
         </p:txBody>
@@ -37868,7 +37868,7 @@
                 </a:solidFill>
                 <a:latin typeface="Arial"/>
               </a:rPr>
-              <a:t>Resources: Exercise Book 3B Q1–3 (p.21); 3C Q2–3 (p.23)</a:t>
+              <a:t>Resources: Exercise Book 3B Q1–3 (p.27); 3C Q2–3 (p.29)</a:t>
             </a:r>
           </a:p>
         </p:txBody>
@@ -38482,7 +38482,7 @@
                 </a:solidFill>
                 <a:latin typeface="Arial"/>
               </a:rPr>
-              <a:t>Textbook Chapter 3 pp.44–51; Chapter 2 pp.31–33</a:t>
+              <a:t>Textbook Chapter 3 pp.68–75; Chapter 2 pp.51–53</a:t>
             </a:r>
           </a:p>
         </p:txBody>
@@ -39303,7 +39303,7 @@
                 </a:solidFill>
                 <a:latin typeface="Arial"/>
               </a:rPr>
-              <a:t>Textbook Chapter 3 pp.44–51; Chapter 2 pp.31–33</a:t>
+              <a:t>Textbook Chapter 3 pp.68–75; Chapter 2 pp.51–53</a:t>
             </a:r>
           </a:p>
         </p:txBody>
@@ -40548,7 +40548,7 @@
                 </a:solidFill>
                 <a:latin typeface="Arial"/>
               </a:rPr>
-              <a:t>Textbook Chapter 3 pp.44–51; Chapter 2 pp.31–33</a:t>
+              <a:t>Textbook Chapter 3 pp.68–75; Chapter 2 pp.51–53</a:t>
             </a:r>
           </a:p>
         </p:txBody>
@@ -41863,7 +41863,7 @@
                 <a:ea typeface="Arial" pitchFamily="34" charset="-122"/>
                 <a:cs typeface="Arial" pitchFamily="34" charset="-120"/>
               </a:rPr>
-              <a:t>W2 L1 • Numeracy Hub Easy practice only after the paper attempt</a:t>
+              <a:t>W2 L1 • Numeracy Hub Level 1 practice only after the paper attempt</a:t>
             </a:r>
             <a:endParaRPr lang="en-US" sz="1050" dirty="0"/>
           </a:p>
@@ -42459,7 +42459,7 @@
                 </a:solidFill>
                 <a:latin typeface="Arial"/>
               </a:rPr>
-              <a:t>Textbook  |  page 44</a:t>
+              <a:t>Textbook  |  page 68</a:t>
             </a:r>
           </a:p>
         </p:txBody>
@@ -42507,7 +42507,7 @@
                 </a:solidFill>
                 <a:latin typeface="Arial"/>
               </a:rPr>
-              <a:t>Textbook Chapter 3 pp.44–51; Chapter 2 pp.31–33</a:t>
+              <a:t>Textbook Chapter 3 pp.68–75; Chapter 2 pp.51–53</a:t>
             </a:r>
           </a:p>
         </p:txBody>
@@ -42579,7 +42579,7 @@
                 </a:solidFill>
                 <a:latin typeface="Arial"/>
               </a:rPr>
-              <a:t>Textbook p.44 · Table 3.1: BEDMAS has four ranks, with left-to-right ties.</a:t>
+              <a:t>Textbook p.68 · Table 3.1: BEDMAS has four ranks, with left-to-right ties.</a:t>
             </a:r>
           </a:p>
         </p:txBody>

--- a/carpentry/intake-142/PowerPoint/Day-03_2026-11-02_Week-2.pptx
+++ b/carpentry/intake-142/PowerPoint/Day-03_2026-11-02_Week-2.pptx
@@ -19335,6 +19335,104 @@
           </a:p>
         </p:txBody>
       </p:sp>
+      <p:sp>
+        <p:nvSpPr>
+          <p:cNvPr id="22" name="Play quiz W02-L01"/>
+          <p:cNvSpPr txBox="1"/>
+          <p:nvPr/>
+        </p:nvSpPr>
+        <p:spPr>
+          <a:xfrm>
+            <a:off x="6355080" y="6606540"/>
+            <a:ext cx="822960" cy="210312"/>
+          </a:xfrm>
+          <a:prstGeom prst="rect">
+            <a:avLst/>
+          </a:prstGeom>
+          <a:noFill/>
+        </p:spPr>
+        <p:txBody>
+          <a:bodyPr wrap="square" lIns="0" rIns="0" tIns="0" bIns="0" anchor="t">
+            <a:normAutofit fontScale="100000" lnSpcReduction="0"/>
+          </a:bodyPr>
+          <a:lstStyle/>
+          <a:p>
+            <a:pPr>
+              <a:spcBef>
+                <a:spcPts val="0"/>
+              </a:spcBef>
+              <a:spcAft>
+                <a:spcPts val="0"/>
+              </a:spcAft>
+              <a:defRPr sz="1000" b="0">
+                <a:solidFill>
+                  <a:srgbClr val="D0002B"/>
+                </a:solidFill>
+                <a:latin typeface="Arial"/>
+              </a:defRPr>
+            </a:pPr>
+            <a:r>
+              <a:rPr sz="1000">
+                <a:solidFill>
+                  <a:srgbClr val="F7F8FC"/>
+                </a:solidFill>
+                <a:latin typeface="Arial"/>
+                <a:hlinkClick r:id="rId8"/>
+              </a:rPr>
+              <a:t>Play quiz</a:t>
+            </a:r>
+          </a:p>
+        </p:txBody>
+      </p:sp>
+      <p:sp>
+        <p:nvSpPr>
+          <p:cNvPr id="23" name="Quiz PDF W02-L01"/>
+          <p:cNvSpPr txBox="1"/>
+          <p:nvPr/>
+        </p:nvSpPr>
+        <p:spPr>
+          <a:xfrm>
+            <a:off x="7296912" y="6606540"/>
+            <a:ext cx="1005840" cy="210312"/>
+          </a:xfrm>
+          <a:prstGeom prst="rect">
+            <a:avLst/>
+          </a:prstGeom>
+          <a:noFill/>
+        </p:spPr>
+        <p:txBody>
+          <a:bodyPr wrap="square" lIns="0" rIns="0" tIns="0" bIns="0" anchor="t">
+            <a:normAutofit fontScale="100000" lnSpcReduction="0"/>
+          </a:bodyPr>
+          <a:lstStyle/>
+          <a:p>
+            <a:pPr>
+              <a:spcBef>
+                <a:spcPts val="0"/>
+              </a:spcBef>
+              <a:spcAft>
+                <a:spcPts val="0"/>
+              </a:spcAft>
+              <a:defRPr sz="1000" b="0">
+                <a:solidFill>
+                  <a:srgbClr val="D0002B"/>
+                </a:solidFill>
+                <a:latin typeface="Arial"/>
+              </a:defRPr>
+            </a:pPr>
+            <a:r>
+              <a:rPr sz="1000">
+                <a:solidFill>
+                  <a:srgbClr val="F7F8FC"/>
+                </a:solidFill>
+                <a:latin typeface="Arial"/>
+                <a:hlinkClick r:id="rId9"/>
+              </a:rPr>
+              <a:t>Quiz PDF</a:t>
+            </a:r>
+          </a:p>
+        </p:txBody>
+      </p:sp>
     </p:spTree>
   </p:cSld>
   <p:clrMapOvr>
@@ -38137,6 +38235,104 @@
                 <a:latin typeface="Arial"/>
               </a:rPr>
               <a:t>Day 03  •  2026-11-02  •  44</a:t>
+            </a:r>
+          </a:p>
+        </p:txBody>
+      </p:sp>
+      <p:sp>
+        <p:nvSpPr>
+          <p:cNvPr id="22" name="Play quiz W02-L02"/>
+          <p:cNvSpPr txBox="1"/>
+          <p:nvPr/>
+        </p:nvSpPr>
+        <p:spPr>
+          <a:xfrm>
+            <a:off x="6355080" y="6606540"/>
+            <a:ext cx="822960" cy="210312"/>
+          </a:xfrm>
+          <a:prstGeom prst="rect">
+            <a:avLst/>
+          </a:prstGeom>
+          <a:noFill/>
+        </p:spPr>
+        <p:txBody>
+          <a:bodyPr wrap="square" lIns="0" rIns="0" tIns="0" bIns="0" anchor="t">
+            <a:normAutofit fontScale="100000" lnSpcReduction="0"/>
+          </a:bodyPr>
+          <a:lstStyle/>
+          <a:p>
+            <a:pPr>
+              <a:spcBef>
+                <a:spcPts val="0"/>
+              </a:spcBef>
+              <a:spcAft>
+                <a:spcPts val="0"/>
+              </a:spcAft>
+              <a:defRPr sz="1000" b="0">
+                <a:solidFill>
+                  <a:srgbClr val="D0002B"/>
+                </a:solidFill>
+                <a:latin typeface="Arial"/>
+              </a:defRPr>
+            </a:pPr>
+            <a:r>
+              <a:rPr sz="1000">
+                <a:solidFill>
+                  <a:srgbClr val="F7F8FC"/>
+                </a:solidFill>
+                <a:latin typeface="Arial"/>
+                <a:hlinkClick r:id="rId8"/>
+              </a:rPr>
+              <a:t>Play quiz</a:t>
+            </a:r>
+          </a:p>
+        </p:txBody>
+      </p:sp>
+      <p:sp>
+        <p:nvSpPr>
+          <p:cNvPr id="23" name="Quiz PDF W02-L02"/>
+          <p:cNvSpPr txBox="1"/>
+          <p:nvPr/>
+        </p:nvSpPr>
+        <p:spPr>
+          <a:xfrm>
+            <a:off x="7296912" y="6606540"/>
+            <a:ext cx="1005840" cy="210312"/>
+          </a:xfrm>
+          <a:prstGeom prst="rect">
+            <a:avLst/>
+          </a:prstGeom>
+          <a:noFill/>
+        </p:spPr>
+        <p:txBody>
+          <a:bodyPr wrap="square" lIns="0" rIns="0" tIns="0" bIns="0" anchor="t">
+            <a:normAutofit fontScale="100000" lnSpcReduction="0"/>
+          </a:bodyPr>
+          <a:lstStyle/>
+          <a:p>
+            <a:pPr>
+              <a:spcBef>
+                <a:spcPts val="0"/>
+              </a:spcBef>
+              <a:spcAft>
+                <a:spcPts val="0"/>
+              </a:spcAft>
+              <a:defRPr sz="1000" b="0">
+                <a:solidFill>
+                  <a:srgbClr val="D0002B"/>
+                </a:solidFill>
+                <a:latin typeface="Arial"/>
+              </a:defRPr>
+            </a:pPr>
+            <a:r>
+              <a:rPr sz="1000">
+                <a:solidFill>
+                  <a:srgbClr val="F7F8FC"/>
+                </a:solidFill>
+                <a:latin typeface="Arial"/>
+                <a:hlinkClick r:id="rId9"/>
+              </a:rPr>
+              <a:t>Quiz PDF</a:t>
             </a:r>
           </a:p>
         </p:txBody>
